--- a/artifacts/editorial_accent_20261022/pptx/Figure07_Accent.pptx
+++ b/artifacts/editorial_accent_20261022/pptx/Figure07_Accent.pptx
@@ -52,6 +52,14 @@
 <file path=ppt/slides/slide1.xml><?xml version="1.0" encoding="utf-8"?>
 <p:sld xmlns:a="http://schemas.openxmlformats.org/drawingml/2006/main" xmlns:r="http://schemas.openxmlformats.org/officeDocument/2006/relationships" xmlns:p="http://schemas.openxmlformats.org/presentationml/2006/main">
   <p:cSld>
+    <p:bg>
+      <p:bgPr>
+        <a:solidFill>
+          <a:srgbClr val="FFFFFF"/>
+        </a:solidFill>
+        <a:effectLst/>
+      </p:bgPr>
+    </p:bg>
     <p:spTree>
       <p:nvGrpSpPr>
         <p:cNvPr id="1" name=""/>
@@ -932,7 +940,7 @@
                     <a:solidFill>
                       <a:srgbClr val="222222"/>
                     </a:solidFill>
-                    <a:latin typeface="Comic Sans MS"/>
+                    <a:latin typeface="Times New Roman"/>
                     <a:ea typeface="Times New Roman"/>
                     <a:cs typeface="Times New Roman"/>
                   </a:rPr>
@@ -978,7 +986,7 @@
                     <a:solidFill>
                       <a:srgbClr val="222222"/>
                     </a:solidFill>
-                    <a:latin typeface="Arial"/>
+                    <a:latin typeface="Times New Roman"/>
                     <a:ea typeface="Times New Roman"/>
                     <a:cs typeface="Times New Roman"/>
                   </a:rPr>
@@ -1024,7 +1032,7 @@
                     <a:solidFill>
                       <a:srgbClr val="222222"/>
                     </a:solidFill>
-                    <a:latin typeface="Arial"/>
+                    <a:latin typeface="Times New Roman"/>
                     <a:ea typeface="Times New Roman"/>
                     <a:cs typeface="Times New Roman"/>
                   </a:rPr>
@@ -1070,7 +1078,7 @@
                     <a:solidFill>
                       <a:srgbClr val="222222"/>
                     </a:solidFill>
-                    <a:latin typeface="Arial"/>
+                    <a:latin typeface="Times New Roman"/>
                     <a:ea typeface="Times New Roman"/>
                     <a:cs typeface="Times New Roman"/>
                   </a:rPr>
@@ -1116,7 +1124,7 @@
                     <a:solidFill>
                       <a:srgbClr val="222222"/>
                     </a:solidFill>
-                    <a:latin typeface="Arial"/>
+                    <a:latin typeface="Times New Roman"/>
                     <a:ea typeface="Times New Roman"/>
                     <a:cs typeface="Times New Roman"/>
                   </a:rPr>
@@ -1162,7 +1170,7 @@
                     <a:solidFill>
                       <a:srgbClr val="222222"/>
                     </a:solidFill>
-                    <a:latin typeface="Arial"/>
+                    <a:latin typeface="Times New Roman"/>
                     <a:ea typeface="Times New Roman"/>
                     <a:cs typeface="Times New Roman"/>
                   </a:rPr>
@@ -1208,7 +1216,7 @@
                     <a:solidFill>
                       <a:srgbClr val="222222"/>
                     </a:solidFill>
-                    <a:latin typeface="Arial"/>
+                    <a:latin typeface="Times New Roman"/>
                     <a:ea typeface="Times New Roman"/>
                     <a:cs typeface="Times New Roman"/>
                   </a:rPr>
@@ -1254,7 +1262,7 @@
                     <a:solidFill>
                       <a:srgbClr val="222222"/>
                     </a:solidFill>
-                    <a:latin typeface="Arial"/>
+                    <a:latin typeface="Times New Roman"/>
                     <a:ea typeface="Times New Roman"/>
                     <a:cs typeface="Times New Roman"/>
                   </a:rPr>
@@ -1371,7 +1379,7 @@
                               <a:solidFill>
                                 <a:srgbClr val="222222"/>
                               </a:solidFill>
-                              <a:latin typeface="Arial"/>
+                              <a:latin typeface="Times New Roman"/>
                               <a:ea typeface="Times New Roman"/>
                               <a:cs typeface="Times New Roman"/>
                             </a:rPr>
@@ -1424,7 +1432,7 @@
                               <a:solidFill>
                                 <a:srgbClr val="222222"/>
                               </a:solidFill>
-                              <a:latin typeface="Arial"/>
+                              <a:latin typeface="Times New Roman"/>
                               <a:ea typeface="Times New Roman"/>
                               <a:cs typeface="Times New Roman"/>
                             </a:rPr>
@@ -1477,7 +1485,7 @@
                               <a:solidFill>
                                 <a:srgbClr val="222222"/>
                               </a:solidFill>
-                              <a:latin typeface="Arial"/>
+                              <a:latin typeface="Times New Roman"/>
                               <a:ea typeface="Times New Roman"/>
                               <a:cs typeface="Times New Roman"/>
                             </a:rPr>
@@ -1532,7 +1540,7 @@
                               <a:solidFill>
                                 <a:srgbClr val="222222"/>
                               </a:solidFill>
-                              <a:latin typeface="Arial"/>
+                              <a:latin typeface="Times New Roman"/>
                               <a:ea typeface="Times New Roman"/>
                               <a:cs typeface="Times New Roman"/>
                             </a:rPr>
@@ -1585,7 +1593,7 @@
                               <a:solidFill>
                                 <a:srgbClr val="222222"/>
                               </a:solidFill>
-                              <a:latin typeface="Arial"/>
+                              <a:latin typeface="Times New Roman"/>
                               <a:ea typeface="Times New Roman"/>
                               <a:cs typeface="Times New Roman"/>
                             </a:rPr>
@@ -1638,7 +1646,7 @@
                               <a:solidFill>
                                 <a:srgbClr val="222222"/>
                               </a:solidFill>
-                              <a:latin typeface="Arial"/>
+                              <a:latin typeface="Times New Roman"/>
                               <a:ea typeface="Times New Roman"/>
                               <a:cs typeface="Times New Roman"/>
                             </a:rPr>
@@ -1693,7 +1701,7 @@
                               <a:solidFill>
                                 <a:srgbClr val="222222"/>
                               </a:solidFill>
-                              <a:latin typeface="Arial"/>
+                              <a:latin typeface="Times New Roman"/>
                               <a:ea typeface="Times New Roman"/>
                               <a:cs typeface="Times New Roman"/>
                             </a:rPr>
@@ -1746,7 +1754,7 @@
                               <a:solidFill>
                                 <a:srgbClr val="222222"/>
                               </a:solidFill>
-                              <a:latin typeface="Arial"/>
+                              <a:latin typeface="Times New Roman"/>
                               <a:ea typeface="Times New Roman"/>
                               <a:cs typeface="Times New Roman"/>
                             </a:rPr>
@@ -1799,7 +1807,7 @@
                               <a:solidFill>
                                 <a:srgbClr val="222222"/>
                               </a:solidFill>
-                              <a:latin typeface="Arial"/>
+                              <a:latin typeface="Times New Roman"/>
                               <a:ea typeface="Times New Roman"/>
                               <a:cs typeface="Times New Roman"/>
                             </a:rPr>
@@ -1854,7 +1862,7 @@
                               <a:solidFill>
                                 <a:srgbClr val="222222"/>
                               </a:solidFill>
-                              <a:latin typeface="Arial"/>
+                              <a:latin typeface="Times New Roman"/>
                               <a:ea typeface="Times New Roman"/>
                               <a:cs typeface="Times New Roman"/>
                             </a:rPr>
@@ -1907,7 +1915,7 @@
                               <a:solidFill>
                                 <a:srgbClr val="222222"/>
                               </a:solidFill>
-                              <a:latin typeface="Arial"/>
+                              <a:latin typeface="Times New Roman"/>
                               <a:ea typeface="Times New Roman"/>
                               <a:cs typeface="Times New Roman"/>
                             </a:rPr>
@@ -1960,7 +1968,7 @@
                               <a:solidFill>
                                 <a:srgbClr val="222222"/>
                               </a:solidFill>
-                              <a:latin typeface="Arial"/>
+                              <a:latin typeface="Times New Roman"/>
                               <a:ea typeface="Times New Roman"/>
                               <a:cs typeface="Times New Roman"/>
                             </a:rPr>
@@ -2015,7 +2023,7 @@
                               <a:solidFill>
                                 <a:srgbClr val="222222"/>
                               </a:solidFill>
-                              <a:latin typeface="Arial"/>
+                              <a:latin typeface="Times New Roman"/>
                               <a:ea typeface="Times New Roman"/>
                               <a:cs typeface="Times New Roman"/>
                             </a:rPr>
@@ -2068,7 +2076,7 @@
                               <a:solidFill>
                                 <a:srgbClr val="222222"/>
                               </a:solidFill>
-                              <a:latin typeface="Arial"/>
+                              <a:latin typeface="Times New Roman"/>
                               <a:ea typeface="Times New Roman"/>
                               <a:cs typeface="Times New Roman"/>
                             </a:rPr>
@@ -2121,7 +2129,7 @@
                               <a:solidFill>
                                 <a:srgbClr val="222222"/>
                               </a:solidFill>
-                              <a:latin typeface="Arial"/>
+                              <a:latin typeface="Times New Roman"/>
                               <a:ea typeface="Times New Roman"/>
                               <a:cs typeface="Times New Roman"/>
                             </a:rPr>
@@ -2197,7 +2205,7 @@
                     <a:solidFill>
                       <a:srgbClr val="222222"/>
                     </a:solidFill>
-                    <a:latin typeface="Comic Sans MS"/>
+                    <a:latin typeface="Times New Roman"/>
                     <a:ea typeface="Times New Roman"/>
                     <a:cs typeface="Times New Roman"/>
                   </a:rPr>
@@ -2243,7 +2251,7 @@
                     <a:solidFill>
                       <a:srgbClr val="222222"/>
                     </a:solidFill>
-                    <a:latin typeface="Arial"/>
+                    <a:latin typeface="Times New Roman"/>
                     <a:ea typeface="Times New Roman"/>
                     <a:cs typeface="Times New Roman"/>
                   </a:rPr>
@@ -2289,7 +2297,7 @@
                     <a:solidFill>
                       <a:srgbClr val="222222"/>
                     </a:solidFill>
-                    <a:latin typeface="Arial"/>
+                    <a:latin typeface="Times New Roman"/>
                     <a:ea typeface="Times New Roman"/>
                     <a:cs typeface="Times New Roman"/>
                   </a:rPr>
@@ -2335,7 +2343,7 @@
                     <a:solidFill>
                       <a:srgbClr val="222222"/>
                     </a:solidFill>
-                    <a:latin typeface="Arial"/>
+                    <a:latin typeface="Times New Roman"/>
                     <a:ea typeface="Times New Roman"/>
                     <a:cs typeface="Times New Roman"/>
                   </a:rPr>
@@ -4640,7 +4648,7 @@
                     <a:solidFill>
                       <a:srgbClr val="222222"/>
                     </a:solidFill>
-                    <a:latin typeface="Comic Sans MS"/>
+                    <a:latin typeface="Times New Roman"/>
                     <a:ea typeface="Times New Roman"/>
                     <a:cs typeface="Times New Roman"/>
                   </a:rPr>
@@ -4686,7 +4694,7 @@
                     <a:solidFill>
                       <a:srgbClr val="222222"/>
                     </a:solidFill>
-                    <a:latin typeface="Arial"/>
+                    <a:latin typeface="Times New Roman"/>
                     <a:ea typeface="Times New Roman"/>
                     <a:cs typeface="Times New Roman"/>
                   </a:rPr>
@@ -4732,7 +4740,7 @@
                     <a:solidFill>
                       <a:srgbClr val="222222"/>
                     </a:solidFill>
-                    <a:latin typeface="Arial"/>
+                    <a:latin typeface="Times New Roman"/>
                     <a:ea typeface="Times New Roman"/>
                     <a:cs typeface="Times New Roman"/>
                   </a:rPr>
@@ -4778,7 +4786,7 @@
                     <a:solidFill>
                       <a:srgbClr val="222222"/>
                     </a:solidFill>
-                    <a:latin typeface="Arial"/>
+                    <a:latin typeface="Times New Roman"/>
                     <a:ea typeface="Times New Roman"/>
                     <a:cs typeface="Times New Roman"/>
                   </a:rPr>
@@ -6585,7 +6593,7 @@
                     <a:solidFill>
                       <a:srgbClr val="222222"/>
                     </a:solidFill>
-                    <a:latin typeface="Comic Sans MS"/>
+                    <a:latin typeface="Times New Roman"/>
                     <a:ea typeface="Times New Roman"/>
                     <a:cs typeface="Times New Roman"/>
                   </a:rPr>
@@ -6631,7 +6639,7 @@
                     <a:solidFill>
                       <a:srgbClr val="222222"/>
                     </a:solidFill>
-                    <a:latin typeface="Arial"/>
+                    <a:latin typeface="Times New Roman"/>
                     <a:ea typeface="Times New Roman"/>
                     <a:cs typeface="Times New Roman"/>
                   </a:rPr>
@@ -6677,7 +6685,7 @@
                     <a:solidFill>
                       <a:srgbClr val="222222"/>
                     </a:solidFill>
-                    <a:latin typeface="Arial"/>
+                    <a:latin typeface="Times New Roman"/>
                     <a:ea typeface="Times New Roman"/>
                     <a:cs typeface="Times New Roman"/>
                   </a:rPr>
@@ -6723,7 +6731,7 @@
                     <a:solidFill>
                       <a:srgbClr val="222222"/>
                     </a:solidFill>
-                    <a:latin typeface="Arial"/>
+                    <a:latin typeface="Times New Roman"/>
                     <a:ea typeface="Times New Roman"/>
                     <a:cs typeface="Times New Roman"/>
                   </a:rPr>
@@ -7137,7 +7145,7 @@
                     <a:solidFill>
                       <a:srgbClr val="222222"/>
                     </a:solidFill>
-                    <a:latin typeface="Comic Sans MS"/>
+                    <a:latin typeface="Times New Roman"/>
                     <a:ea typeface="Times New Roman"/>
                     <a:cs typeface="Times New Roman"/>
                   </a:rPr>
@@ -7183,7 +7191,7 @@
                     <a:solidFill>
                       <a:srgbClr val="222222"/>
                     </a:solidFill>
-                    <a:latin typeface="Arial"/>
+                    <a:latin typeface="Times New Roman"/>
                     <a:ea typeface="Times New Roman"/>
                     <a:cs typeface="Times New Roman"/>
                   </a:rPr>
@@ -7229,7 +7237,7 @@
                     <a:solidFill>
                       <a:srgbClr val="222222"/>
                     </a:solidFill>
-                    <a:latin typeface="Arial"/>
+                    <a:latin typeface="Times New Roman"/>
                     <a:ea typeface="Times New Roman"/>
                     <a:cs typeface="Times New Roman"/>
                   </a:rPr>
@@ -7275,7 +7283,7 @@
                     <a:solidFill>
                       <a:srgbClr val="222222"/>
                     </a:solidFill>
-                    <a:latin typeface="Arial"/>
+                    <a:latin typeface="Times New Roman"/>
                     <a:ea typeface="Times New Roman"/>
                     <a:cs typeface="Times New Roman"/>
                   </a:rPr>
@@ -7321,7 +7329,7 @@
                     <a:solidFill>
                       <a:srgbClr val="222222"/>
                     </a:solidFill>
-                    <a:latin typeface="Arial"/>
+                    <a:latin typeface="Times New Roman"/>
                     <a:ea typeface="Times New Roman"/>
                     <a:cs typeface="Times New Roman"/>
                   </a:rPr>
@@ -7367,7 +7375,7 @@
                     <a:solidFill>
                       <a:srgbClr val="222222"/>
                     </a:solidFill>
-                    <a:latin typeface="Arial"/>
+                    <a:latin typeface="Times New Roman"/>
                     <a:ea typeface="Times New Roman"/>
                     <a:cs typeface="Times New Roman"/>
                   </a:rPr>
@@ -8311,7 +8319,7 @@
                     <a:solidFill>
                       <a:srgbClr val="222222"/>
                     </a:solidFill>
-                    <a:latin typeface="Comic Sans MS"/>
+                    <a:latin typeface="Times New Roman"/>
                     <a:ea typeface="Times New Roman"/>
                     <a:cs typeface="Times New Roman"/>
                   </a:rPr>
@@ -8357,7 +8365,7 @@
                     <a:solidFill>
                       <a:srgbClr val="222222"/>
                     </a:solidFill>
-                    <a:latin typeface="Arial"/>
+                    <a:latin typeface="Times New Roman"/>
                     <a:ea typeface="Times New Roman"/>
                     <a:cs typeface="Times New Roman"/>
                   </a:rPr>
@@ -8403,7 +8411,7 @@
                     <a:solidFill>
                       <a:srgbClr val="222222"/>
                     </a:solidFill>
-                    <a:latin typeface="Arial"/>
+                    <a:latin typeface="Times New Roman"/>
                     <a:ea typeface="Times New Roman"/>
                     <a:cs typeface="Times New Roman"/>
                   </a:rPr>
@@ -8449,7 +8457,7 @@
                     <a:solidFill>
                       <a:srgbClr val="222222"/>
                     </a:solidFill>
-                    <a:latin typeface="Arial"/>
+                    <a:latin typeface="Times New Roman"/>
                     <a:ea typeface="Times New Roman"/>
                     <a:cs typeface="Times New Roman"/>
                   </a:rPr>

--- a/artifacts/editorial_accent_20261022/pptx/Figure07_Accent.pptx
+++ b/artifacts/editorial_accent_20261022/pptx/Figure07_Accent.pptx
@@ -52,14 +52,6 @@
 <file path=ppt/slides/slide1.xml><?xml version="1.0" encoding="utf-8"?>
 <p:sld xmlns:a="http://schemas.openxmlformats.org/drawingml/2006/main" xmlns:r="http://schemas.openxmlformats.org/officeDocument/2006/relationships" xmlns:p="http://schemas.openxmlformats.org/presentationml/2006/main">
   <p:cSld>
-    <p:bg>
-      <p:bgPr>
-        <a:solidFill>
-          <a:srgbClr val="FFFFFF"/>
-        </a:solidFill>
-        <a:effectLst/>
-      </p:bgPr>
-    </p:bg>
     <p:spTree>
       <p:nvGrpSpPr>
         <p:cNvPr id="1" name=""/>
@@ -940,7 +932,7 @@
                     <a:solidFill>
                       <a:srgbClr val="222222"/>
                     </a:solidFill>
-                    <a:latin typeface="Times New Roman"/>
+                    <a:latin typeface="Comic Sans MS"/>
                     <a:ea typeface="Times New Roman"/>
                     <a:cs typeface="Times New Roman"/>
                   </a:rPr>
@@ -986,7 +978,7 @@
                     <a:solidFill>
                       <a:srgbClr val="222222"/>
                     </a:solidFill>
-                    <a:latin typeface="Times New Roman"/>
+                    <a:latin typeface="Arial"/>
                     <a:ea typeface="Times New Roman"/>
                     <a:cs typeface="Times New Roman"/>
                   </a:rPr>
@@ -1032,7 +1024,7 @@
                     <a:solidFill>
                       <a:srgbClr val="222222"/>
                     </a:solidFill>
-                    <a:latin typeface="Times New Roman"/>
+                    <a:latin typeface="Arial"/>
                     <a:ea typeface="Times New Roman"/>
                     <a:cs typeface="Times New Roman"/>
                   </a:rPr>
@@ -1078,7 +1070,7 @@
                     <a:solidFill>
                       <a:srgbClr val="222222"/>
                     </a:solidFill>
-                    <a:latin typeface="Times New Roman"/>
+                    <a:latin typeface="Arial"/>
                     <a:ea typeface="Times New Roman"/>
                     <a:cs typeface="Times New Roman"/>
                   </a:rPr>
@@ -1124,7 +1116,7 @@
                     <a:solidFill>
                       <a:srgbClr val="222222"/>
                     </a:solidFill>
-                    <a:latin typeface="Times New Roman"/>
+                    <a:latin typeface="Arial"/>
                     <a:ea typeface="Times New Roman"/>
                     <a:cs typeface="Times New Roman"/>
                   </a:rPr>
@@ -1170,7 +1162,7 @@
                     <a:solidFill>
                       <a:srgbClr val="222222"/>
                     </a:solidFill>
-                    <a:latin typeface="Times New Roman"/>
+                    <a:latin typeface="Arial"/>
                     <a:ea typeface="Times New Roman"/>
                     <a:cs typeface="Times New Roman"/>
                   </a:rPr>
@@ -1216,7 +1208,7 @@
                     <a:solidFill>
                       <a:srgbClr val="222222"/>
                     </a:solidFill>
-                    <a:latin typeface="Times New Roman"/>
+                    <a:latin typeface="Arial"/>
                     <a:ea typeface="Times New Roman"/>
                     <a:cs typeface="Times New Roman"/>
                   </a:rPr>
@@ -1262,7 +1254,7 @@
                     <a:solidFill>
                       <a:srgbClr val="222222"/>
                     </a:solidFill>
-                    <a:latin typeface="Times New Roman"/>
+                    <a:latin typeface="Arial"/>
                     <a:ea typeface="Times New Roman"/>
                     <a:cs typeface="Times New Roman"/>
                   </a:rPr>
@@ -1379,7 +1371,7 @@
                               <a:solidFill>
                                 <a:srgbClr val="222222"/>
                               </a:solidFill>
-                              <a:latin typeface="Times New Roman"/>
+                              <a:latin typeface="Arial"/>
                               <a:ea typeface="Times New Roman"/>
                               <a:cs typeface="Times New Roman"/>
                             </a:rPr>
@@ -1432,7 +1424,7 @@
                               <a:solidFill>
                                 <a:srgbClr val="222222"/>
                               </a:solidFill>
-                              <a:latin typeface="Times New Roman"/>
+                              <a:latin typeface="Arial"/>
                               <a:ea typeface="Times New Roman"/>
                               <a:cs typeface="Times New Roman"/>
                             </a:rPr>
@@ -1485,7 +1477,7 @@
                               <a:solidFill>
                                 <a:srgbClr val="222222"/>
                               </a:solidFill>
-                              <a:latin typeface="Times New Roman"/>
+                              <a:latin typeface="Arial"/>
                               <a:ea typeface="Times New Roman"/>
                               <a:cs typeface="Times New Roman"/>
                             </a:rPr>
@@ -1540,7 +1532,7 @@
                               <a:solidFill>
                                 <a:srgbClr val="222222"/>
                               </a:solidFill>
-                              <a:latin typeface="Times New Roman"/>
+                              <a:latin typeface="Arial"/>
                               <a:ea typeface="Times New Roman"/>
                               <a:cs typeface="Times New Roman"/>
                             </a:rPr>
@@ -1593,7 +1585,7 @@
                               <a:solidFill>
                                 <a:srgbClr val="222222"/>
                               </a:solidFill>
-                              <a:latin typeface="Times New Roman"/>
+                              <a:latin typeface="Arial"/>
                               <a:ea typeface="Times New Roman"/>
                               <a:cs typeface="Times New Roman"/>
                             </a:rPr>
@@ -1646,7 +1638,7 @@
                               <a:solidFill>
                                 <a:srgbClr val="222222"/>
                               </a:solidFill>
-                              <a:latin typeface="Times New Roman"/>
+                              <a:latin typeface="Arial"/>
                               <a:ea typeface="Times New Roman"/>
                               <a:cs typeface="Times New Roman"/>
                             </a:rPr>
@@ -1701,7 +1693,7 @@
                               <a:solidFill>
                                 <a:srgbClr val="222222"/>
                               </a:solidFill>
-                              <a:latin typeface="Times New Roman"/>
+                              <a:latin typeface="Arial"/>
                               <a:ea typeface="Times New Roman"/>
                               <a:cs typeface="Times New Roman"/>
                             </a:rPr>
@@ -1754,7 +1746,7 @@
                               <a:solidFill>
                                 <a:srgbClr val="222222"/>
                               </a:solidFill>
-                              <a:latin typeface="Times New Roman"/>
+                              <a:latin typeface="Arial"/>
                               <a:ea typeface="Times New Roman"/>
                               <a:cs typeface="Times New Roman"/>
                             </a:rPr>
@@ -1807,7 +1799,7 @@
                               <a:solidFill>
                                 <a:srgbClr val="222222"/>
                               </a:solidFill>
-                              <a:latin typeface="Times New Roman"/>
+                              <a:latin typeface="Arial"/>
                               <a:ea typeface="Times New Roman"/>
                               <a:cs typeface="Times New Roman"/>
                             </a:rPr>
@@ -1862,7 +1854,7 @@
                               <a:solidFill>
                                 <a:srgbClr val="222222"/>
                               </a:solidFill>
-                              <a:latin typeface="Times New Roman"/>
+                              <a:latin typeface="Arial"/>
                               <a:ea typeface="Times New Roman"/>
                               <a:cs typeface="Times New Roman"/>
                             </a:rPr>
@@ -1915,7 +1907,7 @@
                               <a:solidFill>
                                 <a:srgbClr val="222222"/>
                               </a:solidFill>
-                              <a:latin typeface="Times New Roman"/>
+                              <a:latin typeface="Arial"/>
                               <a:ea typeface="Times New Roman"/>
                               <a:cs typeface="Times New Roman"/>
                             </a:rPr>
@@ -1968,7 +1960,7 @@
                               <a:solidFill>
                                 <a:srgbClr val="222222"/>
                               </a:solidFill>
-                              <a:latin typeface="Times New Roman"/>
+                              <a:latin typeface="Arial"/>
                               <a:ea typeface="Times New Roman"/>
                               <a:cs typeface="Times New Roman"/>
                             </a:rPr>
@@ -2023,7 +2015,7 @@
                               <a:solidFill>
                                 <a:srgbClr val="222222"/>
                               </a:solidFill>
-                              <a:latin typeface="Times New Roman"/>
+                              <a:latin typeface="Arial"/>
                               <a:ea typeface="Times New Roman"/>
                               <a:cs typeface="Times New Roman"/>
                             </a:rPr>
@@ -2076,7 +2068,7 @@
                               <a:solidFill>
                                 <a:srgbClr val="222222"/>
                               </a:solidFill>
-                              <a:latin typeface="Times New Roman"/>
+                              <a:latin typeface="Arial"/>
                               <a:ea typeface="Times New Roman"/>
                               <a:cs typeface="Times New Roman"/>
                             </a:rPr>
@@ -2129,7 +2121,7 @@
                               <a:solidFill>
                                 <a:srgbClr val="222222"/>
                               </a:solidFill>
-                              <a:latin typeface="Times New Roman"/>
+                              <a:latin typeface="Arial"/>
                               <a:ea typeface="Times New Roman"/>
                               <a:cs typeface="Times New Roman"/>
                             </a:rPr>
@@ -2205,7 +2197,7 @@
                     <a:solidFill>
                       <a:srgbClr val="222222"/>
                     </a:solidFill>
-                    <a:latin typeface="Times New Roman"/>
+                    <a:latin typeface="Comic Sans MS"/>
                     <a:ea typeface="Times New Roman"/>
                     <a:cs typeface="Times New Roman"/>
                   </a:rPr>
@@ -2251,7 +2243,7 @@
                     <a:solidFill>
                       <a:srgbClr val="222222"/>
                     </a:solidFill>
-                    <a:latin typeface="Times New Roman"/>
+                    <a:latin typeface="Arial"/>
                     <a:ea typeface="Times New Roman"/>
                     <a:cs typeface="Times New Roman"/>
                   </a:rPr>
@@ -2297,7 +2289,7 @@
                     <a:solidFill>
                       <a:srgbClr val="222222"/>
                     </a:solidFill>
-                    <a:latin typeface="Times New Roman"/>
+                    <a:latin typeface="Arial"/>
                     <a:ea typeface="Times New Roman"/>
                     <a:cs typeface="Times New Roman"/>
                   </a:rPr>
@@ -2343,7 +2335,7 @@
                     <a:solidFill>
                       <a:srgbClr val="222222"/>
                     </a:solidFill>
-                    <a:latin typeface="Times New Roman"/>
+                    <a:latin typeface="Arial"/>
                     <a:ea typeface="Times New Roman"/>
                     <a:cs typeface="Times New Roman"/>
                   </a:rPr>
@@ -4648,7 +4640,7 @@
                     <a:solidFill>
                       <a:srgbClr val="222222"/>
                     </a:solidFill>
-                    <a:latin typeface="Times New Roman"/>
+                    <a:latin typeface="Comic Sans MS"/>
                     <a:ea typeface="Times New Roman"/>
                     <a:cs typeface="Times New Roman"/>
                   </a:rPr>
@@ -4694,7 +4686,7 @@
                     <a:solidFill>
                       <a:srgbClr val="222222"/>
                     </a:solidFill>
-                    <a:latin typeface="Times New Roman"/>
+                    <a:latin typeface="Arial"/>
                     <a:ea typeface="Times New Roman"/>
                     <a:cs typeface="Times New Roman"/>
                   </a:rPr>
@@ -4740,7 +4732,7 @@
                     <a:solidFill>
                       <a:srgbClr val="222222"/>
                     </a:solidFill>
-                    <a:latin typeface="Times New Roman"/>
+                    <a:latin typeface="Arial"/>
                     <a:ea typeface="Times New Roman"/>
                     <a:cs typeface="Times New Roman"/>
                   </a:rPr>
@@ -4786,7 +4778,7 @@
                     <a:solidFill>
                       <a:srgbClr val="222222"/>
                     </a:solidFill>
-                    <a:latin typeface="Times New Roman"/>
+                    <a:latin typeface="Arial"/>
                     <a:ea typeface="Times New Roman"/>
                     <a:cs typeface="Times New Roman"/>
                   </a:rPr>
@@ -6593,7 +6585,7 @@
                     <a:solidFill>
                       <a:srgbClr val="222222"/>
                     </a:solidFill>
-                    <a:latin typeface="Times New Roman"/>
+                    <a:latin typeface="Comic Sans MS"/>
                     <a:ea typeface="Times New Roman"/>
                     <a:cs typeface="Times New Roman"/>
                   </a:rPr>
@@ -6639,7 +6631,7 @@
                     <a:solidFill>
                       <a:srgbClr val="222222"/>
                     </a:solidFill>
-                    <a:latin typeface="Times New Roman"/>
+                    <a:latin typeface="Arial"/>
                     <a:ea typeface="Times New Roman"/>
                     <a:cs typeface="Times New Roman"/>
                   </a:rPr>
@@ -6685,7 +6677,7 @@
                     <a:solidFill>
                       <a:srgbClr val="222222"/>
                     </a:solidFill>
-                    <a:latin typeface="Times New Roman"/>
+                    <a:latin typeface="Arial"/>
                     <a:ea typeface="Times New Roman"/>
                     <a:cs typeface="Times New Roman"/>
                   </a:rPr>
@@ -6731,7 +6723,7 @@
                     <a:solidFill>
                       <a:srgbClr val="222222"/>
                     </a:solidFill>
-                    <a:latin typeface="Times New Roman"/>
+                    <a:latin typeface="Arial"/>
                     <a:ea typeface="Times New Roman"/>
                     <a:cs typeface="Times New Roman"/>
                   </a:rPr>
@@ -7145,7 +7137,7 @@
                     <a:solidFill>
                       <a:srgbClr val="222222"/>
                     </a:solidFill>
-                    <a:latin typeface="Times New Roman"/>
+                    <a:latin typeface="Comic Sans MS"/>
                     <a:ea typeface="Times New Roman"/>
                     <a:cs typeface="Times New Roman"/>
                   </a:rPr>
@@ -7191,7 +7183,7 @@
                     <a:solidFill>
                       <a:srgbClr val="222222"/>
                     </a:solidFill>
-                    <a:latin typeface="Times New Roman"/>
+                    <a:latin typeface="Arial"/>
                     <a:ea typeface="Times New Roman"/>
                     <a:cs typeface="Times New Roman"/>
                   </a:rPr>
@@ -7237,7 +7229,7 @@
                     <a:solidFill>
                       <a:srgbClr val="222222"/>
                     </a:solidFill>
-                    <a:latin typeface="Times New Roman"/>
+                    <a:latin typeface="Arial"/>
                     <a:ea typeface="Times New Roman"/>
                     <a:cs typeface="Times New Roman"/>
                   </a:rPr>
@@ -7283,7 +7275,7 @@
                     <a:solidFill>
                       <a:srgbClr val="222222"/>
                     </a:solidFill>
-                    <a:latin typeface="Times New Roman"/>
+                    <a:latin typeface="Arial"/>
                     <a:ea typeface="Times New Roman"/>
                     <a:cs typeface="Times New Roman"/>
                   </a:rPr>
@@ -7329,7 +7321,7 @@
                     <a:solidFill>
                       <a:srgbClr val="222222"/>
                     </a:solidFill>
-                    <a:latin typeface="Times New Roman"/>
+                    <a:latin typeface="Arial"/>
                     <a:ea typeface="Times New Roman"/>
                     <a:cs typeface="Times New Roman"/>
                   </a:rPr>
@@ -7375,7 +7367,7 @@
                     <a:solidFill>
                       <a:srgbClr val="222222"/>
                     </a:solidFill>
-                    <a:latin typeface="Times New Roman"/>
+                    <a:latin typeface="Arial"/>
                     <a:ea typeface="Times New Roman"/>
                     <a:cs typeface="Times New Roman"/>
                   </a:rPr>
@@ -8319,7 +8311,7 @@
                     <a:solidFill>
                       <a:srgbClr val="222222"/>
                     </a:solidFill>
-                    <a:latin typeface="Times New Roman"/>
+                    <a:latin typeface="Comic Sans MS"/>
                     <a:ea typeface="Times New Roman"/>
                     <a:cs typeface="Times New Roman"/>
                   </a:rPr>
@@ -8365,7 +8357,7 @@
                     <a:solidFill>
                       <a:srgbClr val="222222"/>
                     </a:solidFill>
-                    <a:latin typeface="Times New Roman"/>
+                    <a:latin typeface="Arial"/>
                     <a:ea typeface="Times New Roman"/>
                     <a:cs typeface="Times New Roman"/>
                   </a:rPr>
@@ -8411,7 +8403,7 @@
                     <a:solidFill>
                       <a:srgbClr val="222222"/>
                     </a:solidFill>
-                    <a:latin typeface="Times New Roman"/>
+                    <a:latin typeface="Arial"/>
                     <a:ea typeface="Times New Roman"/>
                     <a:cs typeface="Times New Roman"/>
                   </a:rPr>
@@ -8457,7 +8449,7 @@
                     <a:solidFill>
                       <a:srgbClr val="222222"/>
                     </a:solidFill>
-                    <a:latin typeface="Times New Roman"/>
+                    <a:latin typeface="Arial"/>
                     <a:ea typeface="Times New Roman"/>
                     <a:cs typeface="Times New Roman"/>
                   </a:rPr>
